--- a/Day1_Probability/FW536_Day1_Afternoon Distributions I_nosoln.pptx
+++ b/Day1_Probability/FW536_Day1_Afternoon Distributions I_nosoln.pptx
@@ -237,7 +237,7 @@
           <a:p>
             <a:fld id="{EF945995-FC3E-D540-94CA-CACDC057E48E}" type="datetimeFigureOut">
               <a:rPr lang="en-US" smtClean="0"/>
-              <a:t>9/14/25</a:t>
+              <a:t>9/13/26</a:t>
             </a:fld>
             <a:endParaRPr lang="en-US"/>
           </a:p>
@@ -1028,7 +1028,7 @@
               </a14:hiddenEffects>
             </a:ext>
             <a:ext uri="{FAA26D3D-D897-4be2-8F04-BA451C77F1D7}">
-              <ma14:placeholderFlag xmlns:ma14="http://schemas.microsoft.com/office/mac/drawingml/2011/main" xmlns="" val="1"/>
+              <ma14:placeholderFlag xmlns="" xmlns:ma14="http://schemas.microsoft.com/office/mac/drawingml/2011/main" val="1"/>
             </a:ext>
           </a:extLst>
         </p:spPr>
@@ -1113,7 +1113,7 @@
               </a14:hiddenEffects>
             </a:ext>
             <a:ext uri="{FAA26D3D-D897-4be2-8F04-BA451C77F1D7}">
-              <ma14:placeholderFlag xmlns:ma14="http://schemas.microsoft.com/office/mac/drawingml/2011/main" xmlns="" val="1"/>
+              <ma14:placeholderFlag xmlns="" xmlns:ma14="http://schemas.microsoft.com/office/mac/drawingml/2011/main" val="1"/>
             </a:ext>
           </a:extLst>
         </p:spPr>
@@ -1198,7 +1198,7 @@
               </a14:hiddenEffects>
             </a:ext>
             <a:ext uri="{FAA26D3D-D897-4be2-8F04-BA451C77F1D7}">
-              <ma14:placeholderFlag xmlns:ma14="http://schemas.microsoft.com/office/mac/drawingml/2011/main" xmlns="" val="1"/>
+              <ma14:placeholderFlag xmlns="" xmlns:ma14="http://schemas.microsoft.com/office/mac/drawingml/2011/main" val="1"/>
             </a:ext>
           </a:extLst>
         </p:spPr>
@@ -1283,7 +1283,7 @@
               </a14:hiddenEffects>
             </a:ext>
             <a:ext uri="{FAA26D3D-D897-4be2-8F04-BA451C77F1D7}">
-              <ma14:placeholderFlag xmlns:ma14="http://schemas.microsoft.com/office/mac/drawingml/2011/main" xmlns="" val="1"/>
+              <ma14:placeholderFlag xmlns="" xmlns:ma14="http://schemas.microsoft.com/office/mac/drawingml/2011/main" val="1"/>
             </a:ext>
           </a:extLst>
         </p:spPr>
@@ -1435,7 +1435,7 @@
               </a14:hiddenEffects>
             </a:ext>
             <a:ext uri="{FAA26D3D-D897-4be2-8F04-BA451C77F1D7}">
-              <ma14:placeholderFlag xmlns:ma14="http://schemas.microsoft.com/office/mac/drawingml/2011/main" xmlns="" val="1"/>
+              <ma14:placeholderFlag xmlns="" xmlns:ma14="http://schemas.microsoft.com/office/mac/drawingml/2011/main" val="1"/>
             </a:ext>
           </a:extLst>
         </p:spPr>
@@ -1520,7 +1520,7 @@
               </a14:hiddenEffects>
             </a:ext>
             <a:ext uri="{FAA26D3D-D897-4be2-8F04-BA451C77F1D7}">
-              <ma14:placeholderFlag xmlns:ma14="http://schemas.microsoft.com/office/mac/drawingml/2011/main" xmlns="" val="1"/>
+              <ma14:placeholderFlag xmlns="" xmlns:ma14="http://schemas.microsoft.com/office/mac/drawingml/2011/main" val="1"/>
             </a:ext>
           </a:extLst>
         </p:spPr>
@@ -1605,7 +1605,7 @@
               </a14:hiddenEffects>
             </a:ext>
             <a:ext uri="{FAA26D3D-D897-4be2-8F04-BA451C77F1D7}">
-              <ma14:placeholderFlag xmlns:ma14="http://schemas.microsoft.com/office/mac/drawingml/2011/main" xmlns="" val="1"/>
+              <ma14:placeholderFlag xmlns="" xmlns:ma14="http://schemas.microsoft.com/office/mac/drawingml/2011/main" val="1"/>
             </a:ext>
           </a:extLst>
         </p:spPr>
@@ -1690,7 +1690,7 @@
               </a14:hiddenEffects>
             </a:ext>
             <a:ext uri="{FAA26D3D-D897-4be2-8F04-BA451C77F1D7}">
-              <ma14:placeholderFlag xmlns:ma14="http://schemas.microsoft.com/office/mac/drawingml/2011/main" xmlns="" val="1"/>
+              <ma14:placeholderFlag xmlns="" xmlns:ma14="http://schemas.microsoft.com/office/mac/drawingml/2011/main" val="1"/>
             </a:ext>
           </a:extLst>
         </p:spPr>
@@ -1775,7 +1775,7 @@
               </a14:hiddenEffects>
             </a:ext>
             <a:ext uri="{FAA26D3D-D897-4be2-8F04-BA451C77F1D7}">
-              <ma14:placeholderFlag xmlns:ma14="http://schemas.microsoft.com/office/mac/drawingml/2011/main" xmlns="" val="1"/>
+              <ma14:placeholderFlag xmlns="" xmlns:ma14="http://schemas.microsoft.com/office/mac/drawingml/2011/main" val="1"/>
             </a:ext>
           </a:extLst>
         </p:spPr>
@@ -1860,7 +1860,7 @@
               </a14:hiddenEffects>
             </a:ext>
             <a:ext uri="{FAA26D3D-D897-4be2-8F04-BA451C77F1D7}">
-              <ma14:placeholderFlag xmlns:ma14="http://schemas.microsoft.com/office/mac/drawingml/2011/main" xmlns="" val="1"/>
+              <ma14:placeholderFlag xmlns="" xmlns:ma14="http://schemas.microsoft.com/office/mac/drawingml/2011/main" val="1"/>
             </a:ext>
           </a:extLst>
         </p:spPr>
@@ -1945,7 +1945,7 @@
               </a14:hiddenEffects>
             </a:ext>
             <a:ext uri="{FAA26D3D-D897-4be2-8F04-BA451C77F1D7}">
-              <ma14:placeholderFlag xmlns:ma14="http://schemas.microsoft.com/office/mac/drawingml/2011/main" xmlns="" val="1"/>
+              <ma14:placeholderFlag xmlns="" xmlns:ma14="http://schemas.microsoft.com/office/mac/drawingml/2011/main" val="1"/>
             </a:ext>
           </a:extLst>
         </p:spPr>
@@ -2030,7 +2030,7 @@
               </a14:hiddenEffects>
             </a:ext>
             <a:ext uri="{FAA26D3D-D897-4be2-8F04-BA451C77F1D7}">
-              <ma14:placeholderFlag xmlns:ma14="http://schemas.microsoft.com/office/mac/drawingml/2011/main" xmlns="" val="1"/>
+              <ma14:placeholderFlag xmlns="" xmlns:ma14="http://schemas.microsoft.com/office/mac/drawingml/2011/main" val="1"/>
             </a:ext>
           </a:extLst>
         </p:spPr>
@@ -2115,7 +2115,7 @@
               </a14:hiddenEffects>
             </a:ext>
             <a:ext uri="{FAA26D3D-D897-4be2-8F04-BA451C77F1D7}">
-              <ma14:placeholderFlag xmlns:ma14="http://schemas.microsoft.com/office/mac/drawingml/2011/main" xmlns="" val="1"/>
+              <ma14:placeholderFlag xmlns="" xmlns:ma14="http://schemas.microsoft.com/office/mac/drawingml/2011/main" val="1"/>
             </a:ext>
           </a:extLst>
         </p:spPr>
@@ -2803,7 +2803,7 @@
               </a14:hiddenEffects>
             </a:ext>
             <a:ext uri="{FAA26D3D-D897-4be2-8F04-BA451C77F1D7}">
-              <ma14:placeholderFlag xmlns:ma14="http://schemas.microsoft.com/office/mac/drawingml/2011/main" xmlns="" val="1"/>
+              <ma14:placeholderFlag xmlns="" xmlns:ma14="http://schemas.microsoft.com/office/mac/drawingml/2011/main" val="1"/>
             </a:ext>
           </a:extLst>
         </p:spPr>
@@ -3364,7 +3364,7 @@
           <a:p>
             <a:fld id="{AFF33797-E749-0F4D-9D43-8EDD7194A7C5}" type="datetimeFigureOut">
               <a:rPr lang="en-US" smtClean="0"/>
-              <a:t>9/14/25</a:t>
+              <a:t>9/13/26</a:t>
             </a:fld>
             <a:endParaRPr lang="en-US"/>
           </a:p>
@@ -3532,7 +3532,7 @@
           <a:p>
             <a:fld id="{AFF33797-E749-0F4D-9D43-8EDD7194A7C5}" type="datetimeFigureOut">
               <a:rPr lang="en-US" smtClean="0"/>
-              <a:t>9/14/25</a:t>
+              <a:t>9/13/26</a:t>
             </a:fld>
             <a:endParaRPr lang="en-US"/>
           </a:p>
@@ -3710,7 +3710,7 @@
           <a:p>
             <a:fld id="{AFF33797-E749-0F4D-9D43-8EDD7194A7C5}" type="datetimeFigureOut">
               <a:rPr lang="en-US" smtClean="0"/>
-              <a:t>9/14/25</a:t>
+              <a:t>9/13/26</a:t>
             </a:fld>
             <a:endParaRPr lang="en-US"/>
           </a:p>
@@ -4955,7 +4955,7 @@
           <a:p>
             <a:fld id="{AFF33797-E749-0F4D-9D43-8EDD7194A7C5}" type="datetimeFigureOut">
               <a:rPr lang="en-US" smtClean="0"/>
-              <a:t>9/14/25</a:t>
+              <a:t>9/13/26</a:t>
             </a:fld>
             <a:endParaRPr lang="en-US"/>
           </a:p>
@@ -5200,7 +5200,7 @@
           <a:p>
             <a:fld id="{AFF33797-E749-0F4D-9D43-8EDD7194A7C5}" type="datetimeFigureOut">
               <a:rPr lang="en-US" smtClean="0"/>
-              <a:t>9/14/25</a:t>
+              <a:t>9/13/26</a:t>
             </a:fld>
             <a:endParaRPr lang="en-US"/>
           </a:p>
@@ -5429,7 +5429,7 @@
           <a:p>
             <a:fld id="{AFF33797-E749-0F4D-9D43-8EDD7194A7C5}" type="datetimeFigureOut">
               <a:rPr lang="en-US" smtClean="0"/>
-              <a:t>9/14/25</a:t>
+              <a:t>9/13/26</a:t>
             </a:fld>
             <a:endParaRPr lang="en-US"/>
           </a:p>
@@ -5793,7 +5793,7 @@
           <a:p>
             <a:fld id="{AFF33797-E749-0F4D-9D43-8EDD7194A7C5}" type="datetimeFigureOut">
               <a:rPr lang="en-US" smtClean="0"/>
-              <a:t>9/14/25</a:t>
+              <a:t>9/13/26</a:t>
             </a:fld>
             <a:endParaRPr lang="en-US"/>
           </a:p>
@@ -5910,7 +5910,7 @@
           <a:p>
             <a:fld id="{AFF33797-E749-0F4D-9D43-8EDD7194A7C5}" type="datetimeFigureOut">
               <a:rPr lang="en-US" smtClean="0"/>
-              <a:t>9/14/25</a:t>
+              <a:t>9/13/26</a:t>
             </a:fld>
             <a:endParaRPr lang="en-US"/>
           </a:p>
@@ -6005,7 +6005,7 @@
           <a:p>
             <a:fld id="{AFF33797-E749-0F4D-9D43-8EDD7194A7C5}" type="datetimeFigureOut">
               <a:rPr lang="en-US" smtClean="0"/>
-              <a:t>9/14/25</a:t>
+              <a:t>9/13/26</a:t>
             </a:fld>
             <a:endParaRPr lang="en-US"/>
           </a:p>
@@ -6280,7 +6280,7 @@
           <a:p>
             <a:fld id="{AFF33797-E749-0F4D-9D43-8EDD7194A7C5}" type="datetimeFigureOut">
               <a:rPr lang="en-US" smtClean="0"/>
-              <a:t>9/14/25</a:t>
+              <a:t>9/13/26</a:t>
             </a:fld>
             <a:endParaRPr lang="en-US"/>
           </a:p>
@@ -6532,7 +6532,7 @@
           <a:p>
             <a:fld id="{AFF33797-E749-0F4D-9D43-8EDD7194A7C5}" type="datetimeFigureOut">
               <a:rPr lang="en-US" smtClean="0"/>
-              <a:t>9/14/25</a:t>
+              <a:t>9/13/26</a:t>
             </a:fld>
             <a:endParaRPr lang="en-US"/>
           </a:p>
@@ -6743,7 +6743,7 @@
           <a:p>
             <a:fld id="{AFF33797-E749-0F4D-9D43-8EDD7194A7C5}" type="datetimeFigureOut">
               <a:rPr lang="en-US" smtClean="0"/>
-              <a:t>9/14/25</a:t>
+              <a:t>9/13/26</a:t>
             </a:fld>
             <a:endParaRPr lang="en-US"/>
           </a:p>
@@ -19038,35 +19038,6 @@
           </a:p>
         </p:txBody>
       </p:sp>
-      <p:sp>
-        <p:nvSpPr>
-          <p:cNvPr id="2" name="TextBox 1"/>
-          <p:cNvSpPr txBox="1"/>
-          <p:nvPr/>
-        </p:nvSpPr>
-        <p:spPr>
-          <a:xfrm>
-            <a:off x="0" y="6223866"/>
-            <a:ext cx="6912983" cy="461665"/>
-          </a:xfrm>
-          <a:prstGeom prst="rect">
-            <a:avLst/>
-          </a:prstGeom>
-          <a:noFill/>
-        </p:spPr>
-        <p:txBody>
-          <a:bodyPr wrap="none" rtlCol="0">
-            <a:spAutoFit/>
-          </a:bodyPr>
-          <a:lstStyle/>
-          <a:p>
-            <a:r>
-              <a:rPr lang="en-US" sz="2400" dirty="0"/>
-              <a:t>How do we turn this into “failures” instead of “trials”?</a:t>
-            </a:r>
-          </a:p>
-        </p:txBody>
-      </p:sp>
       <p:pic>
         <p:nvPicPr>
           <p:cNvPr id="3" name="Picture 2"/>
@@ -19153,6 +19124,41 @@
               <a:t>(1) # failures/trials before fixed number of successes</a:t>
             </a:r>
             <a:endParaRPr lang="en-US" sz="2400" dirty="0"/>
+          </a:p>
+        </p:txBody>
+      </p:sp>
+      <p:sp>
+        <p:nvSpPr>
+          <p:cNvPr id="5" name="TextBox 4">
+            <a:extLst>
+              <a:ext uri="{FF2B5EF4-FFF2-40B4-BE49-F238E27FC236}">
+                <a16:creationId xmlns:a16="http://schemas.microsoft.com/office/drawing/2014/main" id="{C4B84891-CC8A-6187-FE93-0DCAF4EE7879}"/>
+              </a:ext>
+            </a:extLst>
+          </p:cNvPr>
+          <p:cNvSpPr txBox="1"/>
+          <p:nvPr/>
+        </p:nvSpPr>
+        <p:spPr>
+          <a:xfrm>
+            <a:off x="12107" y="6085223"/>
+            <a:ext cx="5666203" cy="830997"/>
+          </a:xfrm>
+          <a:prstGeom prst="rect">
+            <a:avLst/>
+          </a:prstGeom>
+          <a:noFill/>
+        </p:spPr>
+        <p:txBody>
+          <a:bodyPr wrap="square" rtlCol="0">
+            <a:spAutoFit/>
+          </a:bodyPr>
+          <a:lstStyle/>
+          <a:p>
+            <a:r>
+              <a:rPr lang="en-US" sz="2400" dirty="0"/>
+              <a:t>How do we turn this into “failures”, X=k, until r successes?</a:t>
+            </a:r>
           </a:p>
         </p:txBody>
       </p:sp>
@@ -19232,7 +19238,7 @@
                             </p:stCondLst>
                             <p:childTnLst>
                               <p:par>
-                                <p:cTn id="9" presetID="1" presetClass="entr" presetSubtype="0" fill="hold" grpId="0" nodeType="clickEffect">
+                                <p:cTn id="9" presetID="1" presetClass="entr" presetSubtype="0" fill="hold" nodeType="clickEffect">
                                   <p:stCondLst>
                                     <p:cond delay="0"/>
                                   </p:stCondLst>
@@ -19245,7 +19251,7 @@
                                           </p:stCondLst>
                                         </p:cTn>
                                         <p:tgtEl>
-                                          <p:spTgt spid="2"/>
+                                          <p:spTgt spid="3"/>
                                         </p:tgtEl>
                                         <p:attrNameLst>
                                           <p:attrName>style.visibility</p:attrName>
@@ -19277,7 +19283,7 @@
                             </p:stCondLst>
                             <p:childTnLst>
                               <p:par>
-                                <p:cTn id="13" presetID="1" presetClass="entr" presetSubtype="0" fill="hold" nodeType="clickEffect">
+                                <p:cTn id="13" presetID="1" presetClass="entr" presetSubtype="0" fill="hold" grpId="0" nodeType="clickEffect">
                                   <p:stCondLst>
                                     <p:cond delay="0"/>
                                   </p:stCondLst>
@@ -19290,7 +19296,7 @@
                                           </p:stCondLst>
                                         </p:cTn>
                                         <p:tgtEl>
-                                          <p:spTgt spid="3"/>
+                                          <p:spTgt spid="5"/>
                                         </p:tgtEl>
                                         <p:attrNameLst>
                                           <p:attrName>style.visibility</p:attrName>
@@ -19331,7 +19337,7 @@
       </p:par>
     </p:tnLst>
     <p:bldLst>
-      <p:bldP spid="2" grpId="0"/>
+      <p:bldP spid="5" grpId="0"/>
     </p:bldLst>
   </p:timing>
 </p:sld>
@@ -22416,6 +22422,36 @@
           </a:p>
         </p:txBody>
       </p:sp>
+      <p:pic>
+        <p:nvPicPr>
+          <p:cNvPr id="2" name="Picture 1">
+            <a:extLst>
+              <a:ext uri="{FF2B5EF4-FFF2-40B4-BE49-F238E27FC236}">
+                <a16:creationId xmlns:a16="http://schemas.microsoft.com/office/drawing/2014/main" id="{D277474A-B1A3-3418-FD06-32723BCCC8F4}"/>
+              </a:ext>
+            </a:extLst>
+          </p:cNvPr>
+          <p:cNvPicPr>
+            <a:picLocks noChangeAspect="1"/>
+          </p:cNvPicPr>
+          <p:nvPr/>
+        </p:nvPicPr>
+        <p:blipFill>
+          <a:blip r:embed="rId3"/>
+          <a:stretch>
+            <a:fillRect/>
+          </a:stretch>
+        </p:blipFill>
+        <p:spPr>
+          <a:xfrm>
+            <a:off x="2362200" y="3595571"/>
+            <a:ext cx="6261538" cy="3152067"/>
+          </a:xfrm>
+          <a:prstGeom prst="rect">
+            <a:avLst/>
+          </a:prstGeom>
+        </p:spPr>
+      </p:pic>
     </p:spTree>
     <p:extLst>
       <p:ext uri="{BB962C8B-B14F-4D97-AF65-F5344CB8AC3E}">
@@ -22426,6 +22462,81 @@
   <p:clrMapOvr>
     <a:masterClrMapping/>
   </p:clrMapOvr>
+  <p:timing>
+    <p:tnLst>
+      <p:par>
+        <p:cTn id="1" dur="indefinite" restart="never" nodeType="tmRoot">
+          <p:childTnLst>
+            <p:seq concurrent="1" nextAc="seek">
+              <p:cTn id="2" dur="indefinite" nodeType="mainSeq">
+                <p:childTnLst>
+                  <p:par>
+                    <p:cTn id="3" fill="hold">
+                      <p:stCondLst>
+                        <p:cond delay="indefinite"/>
+                      </p:stCondLst>
+                      <p:childTnLst>
+                        <p:par>
+                          <p:cTn id="4" fill="hold">
+                            <p:stCondLst>
+                              <p:cond delay="0"/>
+                            </p:stCondLst>
+                            <p:childTnLst>
+                              <p:par>
+                                <p:cTn id="5" presetID="1" presetClass="entr" presetSubtype="0" fill="hold" nodeType="clickEffect">
+                                  <p:stCondLst>
+                                    <p:cond delay="0"/>
+                                  </p:stCondLst>
+                                  <p:childTnLst>
+                                    <p:set>
+                                      <p:cBhvr>
+                                        <p:cTn id="6" dur="1" fill="hold">
+                                          <p:stCondLst>
+                                            <p:cond delay="0"/>
+                                          </p:stCondLst>
+                                        </p:cTn>
+                                        <p:tgtEl>
+                                          <p:spTgt spid="2"/>
+                                        </p:tgtEl>
+                                        <p:attrNameLst>
+                                          <p:attrName>style.visibility</p:attrName>
+                                        </p:attrNameLst>
+                                      </p:cBhvr>
+                                      <p:to>
+                                        <p:strVal val="visible"/>
+                                      </p:to>
+                                    </p:set>
+                                  </p:childTnLst>
+                                </p:cTn>
+                              </p:par>
+                            </p:childTnLst>
+                          </p:cTn>
+                        </p:par>
+                      </p:childTnLst>
+                    </p:cTn>
+                  </p:par>
+                </p:childTnLst>
+              </p:cTn>
+              <p:prevCondLst>
+                <p:cond evt="onPrev" delay="0">
+                  <p:tgtEl>
+                    <p:sldTgt/>
+                  </p:tgtEl>
+                </p:cond>
+              </p:prevCondLst>
+              <p:nextCondLst>
+                <p:cond evt="onNext" delay="0">
+                  <p:tgtEl>
+                    <p:sldTgt/>
+                  </p:tgtEl>
+                </p:cond>
+              </p:nextCondLst>
+            </p:seq>
+          </p:childTnLst>
+        </p:cTn>
+      </p:par>
+    </p:tnLst>
+  </p:timing>
 </p:sld>
 </file>
 

--- a/Day1_Probability/FW536_Day1_Afternoon Distributions I_nosoln.pptx
+++ b/Day1_Probability/FW536_Day1_Afternoon Distributions I_nosoln.pptx
@@ -47,7 +47,7 @@
     <p:sldId id="323" r:id="rId38"/>
     <p:sldId id="324" r:id="rId39"/>
     <p:sldId id="326" r:id="rId40"/>
-    <p:sldId id="327" r:id="rId41"/>
+    <p:sldId id="339" r:id="rId41"/>
     <p:sldId id="328" r:id="rId42"/>
   </p:sldIdLst>
   <p:sldSz cx="12192000" cy="6858000"/>
@@ -1028,7 +1028,7 @@
               </a14:hiddenEffects>
             </a:ext>
             <a:ext uri="{FAA26D3D-D897-4be2-8F04-BA451C77F1D7}">
-              <ma14:placeholderFlag xmlns="" xmlns:ma14="http://schemas.microsoft.com/office/mac/drawingml/2011/main" val="1"/>
+              <ma14:placeholderFlag xmlns:ma14="http://schemas.microsoft.com/office/mac/drawingml/2011/main" xmlns="" val="1"/>
             </a:ext>
           </a:extLst>
         </p:spPr>
@@ -1113,7 +1113,7 @@
               </a14:hiddenEffects>
             </a:ext>
             <a:ext uri="{FAA26D3D-D897-4be2-8F04-BA451C77F1D7}">
-              <ma14:placeholderFlag xmlns="" xmlns:ma14="http://schemas.microsoft.com/office/mac/drawingml/2011/main" val="1"/>
+              <ma14:placeholderFlag xmlns:ma14="http://schemas.microsoft.com/office/mac/drawingml/2011/main" xmlns="" val="1"/>
             </a:ext>
           </a:extLst>
         </p:spPr>
@@ -1198,7 +1198,7 @@
               </a14:hiddenEffects>
             </a:ext>
             <a:ext uri="{FAA26D3D-D897-4be2-8F04-BA451C77F1D7}">
-              <ma14:placeholderFlag xmlns="" xmlns:ma14="http://schemas.microsoft.com/office/mac/drawingml/2011/main" val="1"/>
+              <ma14:placeholderFlag xmlns:ma14="http://schemas.microsoft.com/office/mac/drawingml/2011/main" xmlns="" val="1"/>
             </a:ext>
           </a:extLst>
         </p:spPr>
@@ -1283,7 +1283,7 @@
               </a14:hiddenEffects>
             </a:ext>
             <a:ext uri="{FAA26D3D-D897-4be2-8F04-BA451C77F1D7}">
-              <ma14:placeholderFlag xmlns="" xmlns:ma14="http://schemas.microsoft.com/office/mac/drawingml/2011/main" val="1"/>
+              <ma14:placeholderFlag xmlns:ma14="http://schemas.microsoft.com/office/mac/drawingml/2011/main" xmlns="" val="1"/>
             </a:ext>
           </a:extLst>
         </p:spPr>
@@ -1435,7 +1435,7 @@
               </a14:hiddenEffects>
             </a:ext>
             <a:ext uri="{FAA26D3D-D897-4be2-8F04-BA451C77F1D7}">
-              <ma14:placeholderFlag xmlns="" xmlns:ma14="http://schemas.microsoft.com/office/mac/drawingml/2011/main" val="1"/>
+              <ma14:placeholderFlag xmlns:ma14="http://schemas.microsoft.com/office/mac/drawingml/2011/main" xmlns="" val="1"/>
             </a:ext>
           </a:extLst>
         </p:spPr>
@@ -1520,7 +1520,7 @@
               </a14:hiddenEffects>
             </a:ext>
             <a:ext uri="{FAA26D3D-D897-4be2-8F04-BA451C77F1D7}">
-              <ma14:placeholderFlag xmlns="" xmlns:ma14="http://schemas.microsoft.com/office/mac/drawingml/2011/main" val="1"/>
+              <ma14:placeholderFlag xmlns:ma14="http://schemas.microsoft.com/office/mac/drawingml/2011/main" xmlns="" val="1"/>
             </a:ext>
           </a:extLst>
         </p:spPr>
@@ -1605,7 +1605,7 @@
               </a14:hiddenEffects>
             </a:ext>
             <a:ext uri="{FAA26D3D-D897-4be2-8F04-BA451C77F1D7}">
-              <ma14:placeholderFlag xmlns="" xmlns:ma14="http://schemas.microsoft.com/office/mac/drawingml/2011/main" val="1"/>
+              <ma14:placeholderFlag xmlns:ma14="http://schemas.microsoft.com/office/mac/drawingml/2011/main" xmlns="" val="1"/>
             </a:ext>
           </a:extLst>
         </p:spPr>
@@ -1690,7 +1690,7 @@
               </a14:hiddenEffects>
             </a:ext>
             <a:ext uri="{FAA26D3D-D897-4be2-8F04-BA451C77F1D7}">
-              <ma14:placeholderFlag xmlns="" xmlns:ma14="http://schemas.microsoft.com/office/mac/drawingml/2011/main" val="1"/>
+              <ma14:placeholderFlag xmlns:ma14="http://schemas.microsoft.com/office/mac/drawingml/2011/main" xmlns="" val="1"/>
             </a:ext>
           </a:extLst>
         </p:spPr>
@@ -1775,7 +1775,7 @@
               </a14:hiddenEffects>
             </a:ext>
             <a:ext uri="{FAA26D3D-D897-4be2-8F04-BA451C77F1D7}">
-              <ma14:placeholderFlag xmlns="" xmlns:ma14="http://schemas.microsoft.com/office/mac/drawingml/2011/main" val="1"/>
+              <ma14:placeholderFlag xmlns:ma14="http://schemas.microsoft.com/office/mac/drawingml/2011/main" xmlns="" val="1"/>
             </a:ext>
           </a:extLst>
         </p:spPr>
@@ -1860,7 +1860,7 @@
               </a14:hiddenEffects>
             </a:ext>
             <a:ext uri="{FAA26D3D-D897-4be2-8F04-BA451C77F1D7}">
-              <ma14:placeholderFlag xmlns="" xmlns:ma14="http://schemas.microsoft.com/office/mac/drawingml/2011/main" val="1"/>
+              <ma14:placeholderFlag xmlns:ma14="http://schemas.microsoft.com/office/mac/drawingml/2011/main" xmlns="" val="1"/>
             </a:ext>
           </a:extLst>
         </p:spPr>
@@ -1945,7 +1945,7 @@
               </a14:hiddenEffects>
             </a:ext>
             <a:ext uri="{FAA26D3D-D897-4be2-8F04-BA451C77F1D7}">
-              <ma14:placeholderFlag xmlns="" xmlns:ma14="http://schemas.microsoft.com/office/mac/drawingml/2011/main" val="1"/>
+              <ma14:placeholderFlag xmlns:ma14="http://schemas.microsoft.com/office/mac/drawingml/2011/main" xmlns="" val="1"/>
             </a:ext>
           </a:extLst>
         </p:spPr>
@@ -2030,7 +2030,7 @@
               </a14:hiddenEffects>
             </a:ext>
             <a:ext uri="{FAA26D3D-D897-4be2-8F04-BA451C77F1D7}">
-              <ma14:placeholderFlag xmlns="" xmlns:ma14="http://schemas.microsoft.com/office/mac/drawingml/2011/main" val="1"/>
+              <ma14:placeholderFlag xmlns:ma14="http://schemas.microsoft.com/office/mac/drawingml/2011/main" xmlns="" val="1"/>
             </a:ext>
           </a:extLst>
         </p:spPr>
@@ -2115,7 +2115,7 @@
               </a14:hiddenEffects>
             </a:ext>
             <a:ext uri="{FAA26D3D-D897-4be2-8F04-BA451C77F1D7}">
-              <ma14:placeholderFlag xmlns="" xmlns:ma14="http://schemas.microsoft.com/office/mac/drawingml/2011/main" val="1"/>
+              <ma14:placeholderFlag xmlns:ma14="http://schemas.microsoft.com/office/mac/drawingml/2011/main" xmlns="" val="1"/>
             </a:ext>
           </a:extLst>
         </p:spPr>
@@ -2803,7 +2803,7 @@
               </a14:hiddenEffects>
             </a:ext>
             <a:ext uri="{FAA26D3D-D897-4be2-8F04-BA451C77F1D7}">
-              <ma14:placeholderFlag xmlns="" xmlns:ma14="http://schemas.microsoft.com/office/mac/drawingml/2011/main" val="1"/>
+              <ma14:placeholderFlag xmlns:ma14="http://schemas.microsoft.com/office/mac/drawingml/2011/main" xmlns="" val="1"/>
             </a:ext>
           </a:extLst>
         </p:spPr>
@@ -22417,17 +22417,25 @@
             </a:r>
             <a:r>
               <a:rPr lang="en-US" dirty="0"/>
-              <a:t>=1 (i.e. the probability of the number of trials until one success is recorded). </a:t>
+              <a:t>=1 (i.e. the probability of the number of trials </a:t>
+            </a:r>
+            <a:r>
+              <a:rPr lang="en-US" u="sng" dirty="0"/>
+              <a:t>or</a:t>
+            </a:r>
+            <a:r>
+              <a:rPr lang="en-US" dirty="0"/>
+              <a:t> failures until one success is recorded). </a:t>
             </a:r>
           </a:p>
         </p:txBody>
       </p:sp>
       <p:pic>
         <p:nvPicPr>
-          <p:cNvPr id="2" name="Picture 1">
+          <p:cNvPr id="3" name="Picture 2">
             <a:extLst>
               <a:ext uri="{FF2B5EF4-FFF2-40B4-BE49-F238E27FC236}">
-                <a16:creationId xmlns:a16="http://schemas.microsoft.com/office/drawing/2014/main" id="{D277474A-B1A3-3418-FD06-32723BCCC8F4}"/>
+                <a16:creationId xmlns:a16="http://schemas.microsoft.com/office/drawing/2014/main" id="{29811477-F79B-84B5-E2AE-7CCE931CA812}"/>
               </a:ext>
             </a:extLst>
           </p:cNvPr>
@@ -22455,7 +22463,7 @@
     </p:spTree>
     <p:extLst>
       <p:ext uri="{BB962C8B-B14F-4D97-AF65-F5344CB8AC3E}">
-        <p14:creationId xmlns:p14="http://schemas.microsoft.com/office/powerpoint/2010/main" val="1277824568"/>
+        <p14:creationId xmlns:p14="http://schemas.microsoft.com/office/powerpoint/2010/main" val="681644532"/>
       </p:ext>
     </p:extLst>
   </p:cSld>
@@ -22496,7 +22504,7 @@
                                           </p:stCondLst>
                                         </p:cTn>
                                         <p:tgtEl>
-                                          <p:spTgt spid="2"/>
+                                          <p:spTgt spid="3"/>
                                         </p:tgtEl>
                                         <p:attrNameLst>
                                           <p:attrName>style.visibility</p:attrName>
